--- a/public/fun/cards/care/care-29.pptx
+++ b/public/fun/cards/care/care-29.pptx
@@ -3099,20 +3099,107 @@
       <p:grpSpPr/>
       <p:sp>
         <p:nvSpPr>
-          <p:cNvPr id="2" name="Rectangle 1"/>
+          <p:cNvPr id="2" name="Freeform 1"/>
           <p:cNvSpPr/>
           <p:nvPr/>
         </p:nvSpPr>
         <p:spPr>
           <a:xfrm>
-            <a:off x="2196000" y="0"/>
-            <a:ext cx="1044000" cy="1800000"/>
+            <a:off x="2268000" y="0"/>
+            <a:ext cx="972000" cy="972000"/>
           </a:xfrm>
-          <a:prstGeom prst="rect">
+          <a:custGeom>
             <a:avLst/>
-          </a:prstGeom>
+            <a:gdLst/>
+            <a:ahLst/>
+            <a:cxnLst/>
+            <a:rect l="l" t="t" r="r" b="b"/>
+            <a:pathLst>
+              <a:path w="972000" h="972000">
+                <a:moveTo>
+                  <a:pt x="972000" y="0"/>
+                </a:moveTo>
+                <a:lnTo>
+                  <a:pt x="972000" y="972000"/>
+                </a:lnTo>
+                <a:lnTo>
+                  <a:pt x="908428" y="969919"/>
+                </a:lnTo>
+                <a:lnTo>
+                  <a:pt x="845129" y="963684"/>
+                </a:lnTo>
+                <a:lnTo>
+                  <a:pt x="782372" y="953323"/>
+                </a:lnTo>
+                <a:lnTo>
+                  <a:pt x="720428" y="938880"/>
+                </a:lnTo>
+                <a:lnTo>
+                  <a:pt x="659561" y="920416"/>
+                </a:lnTo>
+                <a:lnTo>
+                  <a:pt x="600032" y="898011"/>
+                </a:lnTo>
+                <a:lnTo>
+                  <a:pt x="542095" y="871760"/>
+                </a:lnTo>
+                <a:lnTo>
+                  <a:pt x="486000" y="841777"/>
+                </a:lnTo>
+                <a:lnTo>
+                  <a:pt x="431986" y="808188"/>
+                </a:lnTo>
+                <a:lnTo>
+                  <a:pt x="380284" y="771139"/>
+                </a:lnTo>
+                <a:lnTo>
+                  <a:pt x="331116" y="730788"/>
+                </a:lnTo>
+                <a:lnTo>
+                  <a:pt x="284692" y="687308"/>
+                </a:lnTo>
+                <a:lnTo>
+                  <a:pt x="241212" y="640884"/>
+                </a:lnTo>
+                <a:lnTo>
+                  <a:pt x="200861" y="591716"/>
+                </a:lnTo>
+                <a:lnTo>
+                  <a:pt x="163812" y="540014"/>
+                </a:lnTo>
+                <a:lnTo>
+                  <a:pt x="130223" y="486000"/>
+                </a:lnTo>
+                <a:lnTo>
+                  <a:pt x="100240" y="429905"/>
+                </a:lnTo>
+                <a:lnTo>
+                  <a:pt x="73989" y="371968"/>
+                </a:lnTo>
+                <a:lnTo>
+                  <a:pt x="51584" y="312439"/>
+                </a:lnTo>
+                <a:lnTo>
+                  <a:pt x="33120" y="251572"/>
+                </a:lnTo>
+                <a:lnTo>
+                  <a:pt x="18677" y="189628"/>
+                </a:lnTo>
+                <a:lnTo>
+                  <a:pt x="8316" y="126871"/>
+                </a:lnTo>
+                <a:lnTo>
+                  <a:pt x="2081" y="63572"/>
+                </a:lnTo>
+                <a:lnTo>
+                  <a:pt x="0" y="0"/>
+                </a:lnTo>
+                <a:close/>
+              </a:path>
+            </a:pathLst>
+          </a:custGeom>
           <a:solidFill>
-            <a:srgbClr val="246B53"/>
+            <a:srgbClr val="F0262F"/>
           </a:solidFill>
           <a:ln>
             <a:noFill/>
@@ -3128,20 +3215,107 @@
       </p:sp>
       <p:sp>
         <p:nvSpPr>
-          <p:cNvPr id="3" name="Oval 2"/>
+          <p:cNvPr id="3" name="Freeform 2"/>
           <p:cNvSpPr/>
           <p:nvPr/>
         </p:nvSpPr>
         <p:spPr>
-          <a:xfrm rot="2280000">
-            <a:off x="2607120" y="508320"/>
-            <a:ext cx="221760" cy="423360"/>
+          <a:xfrm>
+            <a:off x="2664000" y="0"/>
+            <a:ext cx="576000" cy="576000"/>
           </a:xfrm>
-          <a:prstGeom prst="ellipse">
+          <a:custGeom>
             <a:avLst/>
-          </a:prstGeom>
+            <a:gdLst/>
+            <a:ahLst/>
+            <a:cxnLst/>
+            <a:rect l="l" t="t" r="r" b="b"/>
+            <a:pathLst>
+              <a:path w="576000" h="576000">
+                <a:moveTo>
+                  <a:pt x="576000" y="0"/>
+                </a:moveTo>
+                <a:lnTo>
+                  <a:pt x="576000" y="576000"/>
+                </a:lnTo>
+                <a:lnTo>
+                  <a:pt x="538328" y="574767"/>
+                </a:lnTo>
+                <a:lnTo>
+                  <a:pt x="500817" y="571072"/>
+                </a:lnTo>
+                <a:lnTo>
+                  <a:pt x="463628" y="564932"/>
+                </a:lnTo>
+                <a:lnTo>
+                  <a:pt x="426920" y="556373"/>
+                </a:lnTo>
+                <a:lnTo>
+                  <a:pt x="390851" y="545432"/>
+                </a:lnTo>
+                <a:lnTo>
+                  <a:pt x="355574" y="532155"/>
+                </a:lnTo>
+                <a:lnTo>
+                  <a:pt x="321242" y="516599"/>
+                </a:lnTo>
+                <a:lnTo>
+                  <a:pt x="288000" y="498831"/>
+                </a:lnTo>
+                <a:lnTo>
+                  <a:pt x="255992" y="478926"/>
+                </a:lnTo>
+                <a:lnTo>
+                  <a:pt x="225353" y="456972"/>
+                </a:lnTo>
+                <a:lnTo>
+                  <a:pt x="196217" y="433060"/>
+                </a:lnTo>
+                <a:lnTo>
+                  <a:pt x="168706" y="407294"/>
+                </a:lnTo>
+                <a:lnTo>
+                  <a:pt x="142940" y="379783"/>
+                </a:lnTo>
+                <a:lnTo>
+                  <a:pt x="119028" y="350647"/>
+                </a:lnTo>
+                <a:lnTo>
+                  <a:pt x="97074" y="320008"/>
+                </a:lnTo>
+                <a:lnTo>
+                  <a:pt x="77169" y="288000"/>
+                </a:lnTo>
+                <a:lnTo>
+                  <a:pt x="59401" y="254758"/>
+                </a:lnTo>
+                <a:lnTo>
+                  <a:pt x="43845" y="220426"/>
+                </a:lnTo>
+                <a:lnTo>
+                  <a:pt x="30568" y="185149"/>
+                </a:lnTo>
+                <a:lnTo>
+                  <a:pt x="19627" y="149080"/>
+                </a:lnTo>
+                <a:lnTo>
+                  <a:pt x="11068" y="112372"/>
+                </a:lnTo>
+                <a:lnTo>
+                  <a:pt x="4928" y="75183"/>
+                </a:lnTo>
+                <a:lnTo>
+                  <a:pt x="1233" y="37672"/>
+                </a:lnTo>
+                <a:lnTo>
+                  <a:pt x="0" y="0"/>
+                </a:lnTo>
+                <a:close/>
+              </a:path>
+            </a:pathLst>
+          </a:custGeom>
           <a:solidFill>
-            <a:srgbClr val="FFFFFF"/>
+            <a:srgbClr val="FDE1E2"/>
           </a:solidFill>
           <a:ln>
             <a:noFill/>
@@ -3155,37 +3329,16 @@
           </a:p>
         </p:txBody>
       </p:sp>
-      <p:cxnSp>
-        <p:nvCxnSpPr>
-          <p:cNvPr id="4" name="Connector 3"/>
-          <p:cNvCxnSpPr/>
-          <p:nvPr/>
-        </p:nvCxnSpPr>
-        <p:spPr>
-          <a:xfrm flipV="1">
-            <a:off x="2586960" y="568800"/>
-            <a:ext cx="252000" cy="302400"/>
-          </a:xfrm>
-          <a:prstGeom prst="line">
-            <a:avLst/>
-          </a:prstGeom>
-          <a:ln w="20160">
-            <a:solidFill>
-              <a:srgbClr val="808080"/>
-            </a:solidFill>
-          </a:ln>
-        </p:spPr>
-      </p:cxnSp>
-      <p:sp>
-        <p:nvSpPr>
-          <p:cNvPr id="5" name="텍스트"/>
+      <p:sp>
+        <p:nvSpPr>
+          <p:cNvPr id="4" name="텍스트"/>
           <p:cNvSpPr txBox="1"/>
           <p:nvPr/>
         </p:nvSpPr>
         <p:spPr>
           <a:xfrm>
-            <a:off x="2268000" y="1224000"/>
-            <a:ext cx="900000" cy="216000"/>
+            <a:off x="252000" y="540000"/>
+            <a:ext cx="1944000" cy="360000"/>
           </a:xfrm>
           <a:prstGeom prst="rect">
             <a:avLst/>
@@ -3198,34 +3351,34 @@
           </a:bodyPr>
           <a:lstStyle/>
           <a:p>
-            <a:pPr algn="ctr">
+            <a:pPr algn="l">
               <a:lnSpc>
-                <a:spcPts val="1160"/>
+                <a:spcPts val="3190"/>
               </a:lnSpc>
             </a:pPr>
             <a:r>
-              <a:rPr sz="800" b="1" spc="150">
+              <a:rPr sz="2200" b="1">
                 <a:solidFill>
-                  <a:srgbClr val="FFFFFF"/>
+                  <a:srgbClr val="12151C"/>
                 </a:solidFill>
                 <a:latin typeface="맑은 고딕"/>
                 <a:ea typeface="맑은 고딕"/>
               </a:rPr>
-              <a:t>의원 · 약국 이름</a:t>
-            </a:r>
-          </a:p>
-        </p:txBody>
-      </p:sp>
-      <p:sp>
-        <p:nvSpPr>
-          <p:cNvPr id="6" name="텍스트"/>
+              <a:t>심소담</a:t>
+            </a:r>
+          </a:p>
+        </p:txBody>
+      </p:sp>
+      <p:sp>
+        <p:nvSpPr>
+          <p:cNvPr id="5" name="텍스트"/>
           <p:cNvSpPr txBox="1"/>
           <p:nvPr/>
         </p:nvSpPr>
         <p:spPr>
           <a:xfrm>
-            <a:off x="216000" y="331200"/>
-            <a:ext cx="1872000" cy="313692"/>
+            <a:off x="252000" y="943200"/>
+            <a:ext cx="1944000" cy="171451"/>
           </a:xfrm>
           <a:prstGeom prst="rect">
             <a:avLst/>
@@ -3240,32 +3393,32 @@
           <a:p>
             <a:pPr algn="l">
               <a:lnSpc>
-                <a:spcPts val="2755"/>
+                <a:spcPts val="1305"/>
               </a:lnSpc>
             </a:pPr>
             <a:r>
-              <a:rPr sz="1900" b="1" spc="50">
+              <a:rPr sz="900" b="0">
                 <a:solidFill>
-                  <a:srgbClr val="143D30"/>
+                  <a:srgbClr val="6B7280"/>
                 </a:solidFill>
-                <a:latin typeface="바탕"/>
-                <a:ea typeface="바탕"/>
+                <a:latin typeface="맑은 고딕"/>
+                <a:ea typeface="맑은 고딕"/>
               </a:rPr>
-              <a:t>심소담</a:t>
-            </a:r>
-          </a:p>
-        </p:txBody>
-      </p:sp>
-      <p:sp>
-        <p:nvSpPr>
-          <p:cNvPr id="7" name="텍스트"/>
+              <a:t>사회복지사</a:t>
+            </a:r>
+          </a:p>
+        </p:txBody>
+      </p:sp>
+      <p:sp>
+        <p:nvSpPr>
+          <p:cNvPr id="6" name="텍스트"/>
           <p:cNvSpPr txBox="1"/>
           <p:nvPr/>
         </p:nvSpPr>
         <p:spPr>
           <a:xfrm>
-            <a:off x="216000" y="619200"/>
-            <a:ext cx="1872000" cy="122400"/>
+            <a:off x="252000" y="223200"/>
+            <a:ext cx="1440000" cy="133351"/>
           </a:xfrm>
           <a:prstGeom prst="rect">
             <a:avLst/>
@@ -3280,61 +3433,32 @@
           <a:p>
             <a:pPr algn="l">
               <a:lnSpc>
-                <a:spcPts val="1232"/>
+                <a:spcPts val="1015"/>
               </a:lnSpc>
             </a:pPr>
             <a:r>
-              <a:rPr sz="850" b="1">
+              <a:rPr sz="700" b="1" spc="200">
                 <a:solidFill>
-                  <a:srgbClr val="246B53"/>
+                  <a:srgbClr val="6B7280"/>
                 </a:solidFill>
                 <a:latin typeface="맑은 고딕"/>
                 <a:ea typeface="맑은 고딕"/>
               </a:rPr>
-              <a:t>사회복지사</a:t>
-            </a:r>
-          </a:p>
-        </p:txBody>
-      </p:sp>
-      <p:sp>
-        <p:nvSpPr>
-          <p:cNvPr id="8" name="Rectangle 7"/>
-          <p:cNvSpPr/>
+              <a:t>의원 · 약국 이름</a:t>
+            </a:r>
+          </a:p>
+        </p:txBody>
+      </p:sp>
+      <p:sp>
+        <p:nvSpPr>
+          <p:cNvPr id="7" name="텍스트"/>
+          <p:cNvSpPr txBox="1"/>
           <p:nvPr/>
         </p:nvSpPr>
         <p:spPr>
           <a:xfrm>
-            <a:off x="216000" y="828000"/>
-            <a:ext cx="201600" cy="14400"/>
-          </a:xfrm>
-          <a:prstGeom prst="rect">
-            <a:avLst/>
-          </a:prstGeom>
-          <a:solidFill>
-            <a:srgbClr val="246B53"/>
-          </a:solidFill>
-          <a:ln>
-            <a:noFill/>
-          </a:ln>
-        </p:spPr>
-        <p:txBody>
-          <a:bodyPr rtlCol="0" anchor="ctr"/>
-          <a:lstStyle/>
-          <a:p>
-            <a:pPr algn="ctr"/>
-          </a:p>
-        </p:txBody>
-      </p:sp>
-      <p:sp>
-        <p:nvSpPr>
-          <p:cNvPr id="9" name="텍스트"/>
-          <p:cNvSpPr txBox="1"/>
-          <p:nvPr/>
-        </p:nvSpPr>
-        <p:spPr>
-          <a:xfrm>
-            <a:off x="216000" y="1008000"/>
-            <a:ext cx="122400" cy="168911"/>
+            <a:off x="252000" y="1234800"/>
+            <a:ext cx="331200" cy="99061"/>
           </a:xfrm>
           <a:prstGeom prst="rect">
             <a:avLst/>
@@ -3349,32 +3473,32 @@
           <a:p>
             <a:pPr algn="l">
               <a:lnSpc>
-                <a:spcPts val="1015"/>
+                <a:spcPts val="754"/>
               </a:lnSpc>
             </a:pPr>
             <a:r>
-              <a:rPr sz="700" b="1">
+              <a:rPr sz="520" b="1" spc="120">
                 <a:solidFill>
-                  <a:srgbClr val="246B53"/>
+                  <a:srgbClr val="6B7280"/>
                 </a:solidFill>
                 <a:latin typeface="맑은 고딕"/>
                 <a:ea typeface="맑은 고딕"/>
               </a:rPr>
-              <a:t>T</a:t>
-            </a:r>
-          </a:p>
-        </p:txBody>
-      </p:sp>
-      <p:sp>
-        <p:nvSpPr>
-          <p:cNvPr id="10" name="텍스트"/>
+              <a:t>TEL</a:t>
+            </a:r>
+          </a:p>
+        </p:txBody>
+      </p:sp>
+      <p:sp>
+        <p:nvSpPr>
+          <p:cNvPr id="8" name="텍스트"/>
           <p:cNvSpPr txBox="1"/>
           <p:nvPr/>
         </p:nvSpPr>
         <p:spPr>
           <a:xfrm>
-            <a:off x="360000" y="1008000"/>
-            <a:ext cx="1584000" cy="168911"/>
+            <a:off x="583200" y="1224000"/>
+            <a:ext cx="1512000" cy="133351"/>
           </a:xfrm>
           <a:prstGeom prst="rect">
             <a:avLst/>
@@ -3395,7 +3519,7 @@
             <a:r>
               <a:rPr sz="700" b="0">
                 <a:solidFill>
-                  <a:srgbClr val="143D30"/>
+                  <a:srgbClr val="12151C"/>
                 </a:solidFill>
                 <a:latin typeface="맑은 고딕"/>
                 <a:ea typeface="맑은 고딕"/>
@@ -3407,14 +3531,14 @@
       </p:sp>
       <p:sp>
         <p:nvSpPr>
-          <p:cNvPr id="11" name="텍스트"/>
+          <p:cNvPr id="9" name="텍스트"/>
           <p:cNvSpPr txBox="1"/>
           <p:nvPr/>
         </p:nvSpPr>
         <p:spPr>
           <a:xfrm>
-            <a:off x="216000" y="1176911"/>
-            <a:ext cx="122400" cy="168911"/>
+            <a:off x="252000" y="1371600"/>
+            <a:ext cx="331200" cy="99061"/>
           </a:xfrm>
           <a:prstGeom prst="rect">
             <a:avLst/>
@@ -3429,32 +3553,32 @@
           <a:p>
             <a:pPr algn="l">
               <a:lnSpc>
-                <a:spcPts val="1015"/>
+                <a:spcPts val="754"/>
               </a:lnSpc>
             </a:pPr>
             <a:r>
-              <a:rPr sz="700" b="1">
+              <a:rPr sz="520" b="1" spc="120">
                 <a:solidFill>
-                  <a:srgbClr val="246B53"/>
+                  <a:srgbClr val="6B7280"/>
                 </a:solidFill>
                 <a:latin typeface="맑은 고딕"/>
                 <a:ea typeface="맑은 고딕"/>
               </a:rPr>
-              <a:t>E</a:t>
-            </a:r>
-          </a:p>
-        </p:txBody>
-      </p:sp>
-      <p:sp>
-        <p:nvSpPr>
-          <p:cNvPr id="12" name="텍스트"/>
+              <a:t>MAIL</a:t>
+            </a:r>
+          </a:p>
+        </p:txBody>
+      </p:sp>
+      <p:sp>
+        <p:nvSpPr>
+          <p:cNvPr id="10" name="텍스트"/>
           <p:cNvSpPr txBox="1"/>
           <p:nvPr/>
         </p:nvSpPr>
         <p:spPr>
           <a:xfrm>
-            <a:off x="360000" y="1176911"/>
-            <a:ext cx="1584000" cy="168911"/>
+            <a:off x="583200" y="1360800"/>
+            <a:ext cx="1512000" cy="133351"/>
           </a:xfrm>
           <a:prstGeom prst="rect">
             <a:avLst/>
@@ -3475,7 +3599,7 @@
             <a:r>
               <a:rPr sz="700" b="0">
                 <a:solidFill>
-                  <a:srgbClr val="143D30"/>
+                  <a:srgbClr val="12151C"/>
                 </a:solidFill>
                 <a:latin typeface="맑은 고딕"/>
                 <a:ea typeface="맑은 고딕"/>
@@ -3487,14 +3611,14 @@
       </p:sp>
       <p:sp>
         <p:nvSpPr>
-          <p:cNvPr id="13" name="텍스트"/>
+          <p:cNvPr id="11" name="텍스트"/>
           <p:cNvSpPr txBox="1"/>
           <p:nvPr/>
         </p:nvSpPr>
         <p:spPr>
           <a:xfrm>
-            <a:off x="216000" y="1345822"/>
-            <a:ext cx="122400" cy="168911"/>
+            <a:off x="252000" y="1508400"/>
+            <a:ext cx="331200" cy="99061"/>
           </a:xfrm>
           <a:prstGeom prst="rect">
             <a:avLst/>
@@ -3509,32 +3633,32 @@
           <a:p>
             <a:pPr algn="l">
               <a:lnSpc>
-                <a:spcPts val="1015"/>
+                <a:spcPts val="754"/>
               </a:lnSpc>
             </a:pPr>
             <a:r>
-              <a:rPr sz="700" b="1">
+              <a:rPr sz="520" b="1" spc="120">
                 <a:solidFill>
-                  <a:srgbClr val="246B53"/>
+                  <a:srgbClr val="6B7280"/>
                 </a:solidFill>
                 <a:latin typeface="맑은 고딕"/>
                 <a:ea typeface="맑은 고딕"/>
               </a:rPr>
-              <a:t>A</a:t>
-            </a:r>
-          </a:p>
-        </p:txBody>
-      </p:sp>
-      <p:sp>
-        <p:nvSpPr>
-          <p:cNvPr id="14" name="텍스트"/>
+              <a:t>ADDR</a:t>
+            </a:r>
+          </a:p>
+        </p:txBody>
+      </p:sp>
+      <p:sp>
+        <p:nvSpPr>
+          <p:cNvPr id="12" name="텍스트"/>
           <p:cNvSpPr txBox="1"/>
           <p:nvPr/>
         </p:nvSpPr>
         <p:spPr>
           <a:xfrm>
-            <a:off x="360000" y="1345822"/>
-            <a:ext cx="1584000" cy="168911"/>
+            <a:off x="583200" y="1497600"/>
+            <a:ext cx="1512000" cy="133351"/>
           </a:xfrm>
           <a:prstGeom prst="rect">
             <a:avLst/>
@@ -3555,7 +3679,7 @@
             <a:r>
               <a:rPr sz="700" b="0">
                 <a:solidFill>
-                  <a:srgbClr val="143D30"/>
+                  <a:srgbClr val="12151C"/>
                 </a:solidFill>
                 <a:latin typeface="맑은 고딕"/>
                 <a:ea typeface="맑은 고딕"/>
@@ -3579,7 +3703,7 @@
     <p:bg>
       <p:bgPr>
         <a:solidFill>
-          <a:srgbClr val="F0F8F9"/>
+          <a:srgbClr val="FEE9EA"/>
         </a:solidFill>
         <a:effectLst/>
       </p:bgPr>
@@ -3599,14 +3723,14 @@
         </p:nvSpPr>
         <p:spPr>
           <a:xfrm>
-            <a:off x="0" y="0"/>
-            <a:ext cx="64800" cy="1800000"/>
+            <a:off x="252000" y="540000"/>
+            <a:ext cx="28800" cy="720000"/>
           </a:xfrm>
           <a:prstGeom prst="rect">
             <a:avLst/>
           </a:prstGeom>
           <a:solidFill>
-            <a:srgbClr val="3F95A6"/>
+            <a:srgbClr val="F0262F"/>
           </a:solidFill>
           <a:ln>
             <a:noFill/>
@@ -3628,8 +3752,8 @@
         </p:nvSpPr>
         <p:spPr>
           <a:xfrm>
-            <a:off x="252000" y="432000"/>
-            <a:ext cx="2016000" cy="252000"/>
+            <a:off x="424800" y="612000"/>
+            <a:ext cx="2160000" cy="648000"/>
           </a:xfrm>
           <a:prstGeom prst="rect">
             <a:avLst/>
@@ -3644,18 +3768,35 @@
           <a:p>
             <a:pPr algn="l">
               <a:lnSpc>
-                <a:spcPts val="2465"/>
+                <a:spcPts val="1812"/>
               </a:lnSpc>
             </a:pPr>
             <a:r>
-              <a:rPr sz="1700" b="1">
+              <a:rPr sz="1250" b="1">
                 <a:solidFill>
-                  <a:srgbClr val="23535C"/>
+                  <a:srgbClr val="12151C"/>
                 </a:solidFill>
-                <a:latin typeface="바탕"/>
-                <a:ea typeface="바탕"/>
+                <a:latin typeface="맑은 고딕"/>
+                <a:ea typeface="맑은 고딕"/>
               </a:rPr>
-              <a:t>의원 · 약국 이름</a:t>
+              <a:t>환하게 웃는</a:t>
+            </a:r>
+          </a:p>
+          <a:p>
+            <a:pPr algn="l">
+              <a:lnSpc>
+                <a:spcPts val="1812"/>
+              </a:lnSpc>
+            </a:pPr>
+            <a:r>
+              <a:rPr sz="1250" b="1">
+                <a:solidFill>
+                  <a:srgbClr val="12151C"/>
+                </a:solidFill>
+                <a:latin typeface="맑은 고딕"/>
+                <a:ea typeface="맑은 고딕"/>
+              </a:rPr>
+              <a:t>하루를 돕겠습니다</a:t>
             </a:r>
           </a:p>
         </p:txBody>
@@ -3668,8 +3809,8 @@
         </p:nvSpPr>
         <p:spPr>
           <a:xfrm>
-            <a:off x="252000" y="878400"/>
-            <a:ext cx="2016000" cy="540000"/>
+            <a:off x="424800" y="1512000"/>
+            <a:ext cx="1800000" cy="123826"/>
           </a:xfrm>
           <a:prstGeom prst="rect">
             <a:avLst/>
@@ -3684,171 +3825,22 @@
           <a:p>
             <a:pPr algn="l">
               <a:lnSpc>
-                <a:spcPts val="1232"/>
+                <a:spcPts val="942"/>
               </a:lnSpc>
             </a:pPr>
             <a:r>
-              <a:rPr sz="850" b="0">
+              <a:rPr sz="650" b="1" spc="200">
                 <a:solidFill>
-                  <a:srgbClr val="567176"/>
-                </a:solidFill>
-                <a:latin typeface="바탕"/>
-                <a:ea typeface="바탕"/>
-              </a:rPr>
-              <a:t>환하게 웃는 하루를 돕겠습니다</a:t>
-            </a:r>
-          </a:p>
-        </p:txBody>
-      </p:sp>
-      <p:sp>
-        <p:nvSpPr>
-          <p:cNvPr id="5" name="Rectangle 4"/>
-          <p:cNvSpPr/>
-          <p:nvPr/>
-        </p:nvSpPr>
-        <p:spPr>
-          <a:xfrm>
-            <a:off x="2520000" y="1080000"/>
-            <a:ext cx="504000" cy="504000"/>
-          </a:xfrm>
-          <a:prstGeom prst="rect">
-            <a:avLst/>
-          </a:prstGeom>
-          <a:noFill/>
-          <a:ln w="9000">
-            <a:solidFill>
-              <a:srgbClr val="3F95A6"/>
-            </a:solidFill>
-            <a:prstDash val="dash"/>
-          </a:ln>
-        </p:spPr>
-        <p:txBody>
-          <a:bodyPr rtlCol="0" anchor="ctr"/>
-          <a:lstStyle/>
-          <a:p>
-            <a:pPr algn="ctr"/>
-          </a:p>
-        </p:txBody>
-      </p:sp>
-      <p:sp>
-        <p:nvSpPr>
-          <p:cNvPr id="6" name="텍스트"/>
-          <p:cNvSpPr txBox="1"/>
-          <p:nvPr/>
-        </p:nvSpPr>
-        <p:spPr>
-          <a:xfrm>
-            <a:off x="2520000" y="1080000"/>
-            <a:ext cx="504000" cy="504000"/>
-          </a:xfrm>
-          <a:prstGeom prst="rect">
-            <a:avLst/>
-          </a:prstGeom>
-          <a:noFill/>
-        </p:spPr>
-        <p:txBody>
-          <a:bodyPr wrap="square" lIns="0" rIns="0" tIns="0" bIns="0" anchor="ctr">
-            <a:spAutoFit/>
-          </a:bodyPr>
-          <a:lstStyle/>
-          <a:p>
-            <a:pPr algn="ctr">
-              <a:lnSpc>
-                <a:spcPts val="1305"/>
-              </a:lnSpc>
-            </a:pPr>
-            <a:r>
-              <a:rPr sz="900" b="1">
-                <a:solidFill>
-                  <a:srgbClr val="567176"/>
+                  <a:srgbClr val="661B23"/>
                 </a:solidFill>
                 <a:latin typeface="맑은 고딕"/>
                 <a:ea typeface="맑은 고딕"/>
               </a:rPr>
-              <a:t>QR</a:t>
-            </a:r>
-          </a:p>
-        </p:txBody>
-      </p:sp>
-      <p:sp>
-        <p:nvSpPr>
-          <p:cNvPr id="7" name="Rectangle 6"/>
-          <p:cNvSpPr/>
-          <p:nvPr/>
-        </p:nvSpPr>
-        <p:spPr>
-          <a:xfrm>
-            <a:off x="252000" y="763200"/>
-            <a:ext cx="201600" cy="14400"/>
-          </a:xfrm>
-          <a:prstGeom prst="rect">
-            <a:avLst/>
-          </a:prstGeom>
-          <a:solidFill>
-            <a:srgbClr val="3F95A6"/>
-          </a:solidFill>
-          <a:ln>
-            <a:noFill/>
-          </a:ln>
-        </p:spPr>
-        <p:txBody>
-          <a:bodyPr rtlCol="0" anchor="ctr"/>
-          <a:lstStyle/>
-          <a:p>
-            <a:pPr algn="ctr"/>
-          </a:p>
-        </p:txBody>
-      </p:sp>
-      <p:sp>
-        <p:nvSpPr>
-          <p:cNvPr id="8" name="Oval 7"/>
-          <p:cNvSpPr/>
-          <p:nvPr/>
-        </p:nvSpPr>
-        <p:spPr>
-          <a:xfrm rot="2280000">
-            <a:off x="2700720" y="295920"/>
-            <a:ext cx="142560" cy="272160"/>
-          </a:xfrm>
-          <a:prstGeom prst="ellipse">
-            <a:avLst/>
-          </a:prstGeom>
-          <a:solidFill>
-            <a:srgbClr val="3F95A6"/>
-          </a:solidFill>
-          <a:ln>
-            <a:noFill/>
-          </a:ln>
-        </p:spPr>
-        <p:txBody>
-          <a:bodyPr rtlCol="0" anchor="ctr"/>
-          <a:lstStyle/>
-          <a:p>
-            <a:pPr algn="ctr"/>
-          </a:p>
-        </p:txBody>
-      </p:sp>
-      <p:cxnSp>
-        <p:nvCxnSpPr>
-          <p:cNvPr id="9" name="Connector 8"/>
-          <p:cNvCxnSpPr/>
-          <p:nvPr/>
-        </p:nvCxnSpPr>
-        <p:spPr>
-          <a:xfrm flipV="1">
-            <a:off x="2687760" y="334800"/>
-            <a:ext cx="162000" cy="194400"/>
-          </a:xfrm>
-          <a:prstGeom prst="line">
-            <a:avLst/>
-          </a:prstGeom>
-          <a:ln w="12960">
-            <a:solidFill>
-              <a:srgbClr val="DFF1F4"/>
-            </a:solidFill>
-          </a:ln>
-        </p:spPr>
-      </p:cxnSp>
+              <a:t>의원 · 약국 이름</a:t>
+            </a:r>
+          </a:p>
+        </p:txBody>
+      </p:sp>
     </p:spTree>
   </p:cSld>
   <p:clrMapOvr>

--- a/public/fun/cards/care/care-29.pptx
+++ b/public/fun/cards/care/care-29.pptx
@@ -3099,105 +3099,134 @@
       <p:grpSpPr/>
       <p:sp>
         <p:nvSpPr>
-          <p:cNvPr id="2" name="Freeform 1"/>
+          <p:cNvPr id="2" name="Oval 1"/>
           <p:cNvSpPr/>
           <p:nvPr/>
         </p:nvSpPr>
         <p:spPr>
           <a:xfrm>
-            <a:off x="2268000" y="0"/>
-            <a:ext cx="972000" cy="972000"/>
-          </a:xfrm>
-          <a:custGeom>
+            <a:off x="2304000" y="684000"/>
+            <a:ext cx="432000" cy="432000"/>
+          </a:xfrm>
+          <a:prstGeom prst="ellipse">
             <a:avLst/>
-            <a:gdLst/>
-            <a:ahLst/>
-            <a:cxnLst/>
-            <a:rect l="l" t="t" r="r" b="b"/>
-            <a:pathLst>
-              <a:path w="972000" h="972000">
-                <a:moveTo>
-                  <a:pt x="972000" y="0"/>
-                </a:moveTo>
-                <a:lnTo>
-                  <a:pt x="972000" y="972000"/>
-                </a:lnTo>
-                <a:lnTo>
-                  <a:pt x="908428" y="969919"/>
-                </a:lnTo>
-                <a:lnTo>
-                  <a:pt x="845129" y="963684"/>
-                </a:lnTo>
-                <a:lnTo>
-                  <a:pt x="782372" y="953323"/>
-                </a:lnTo>
-                <a:lnTo>
-                  <a:pt x="720428" y="938880"/>
-                </a:lnTo>
-                <a:lnTo>
-                  <a:pt x="659561" y="920416"/>
-                </a:lnTo>
-                <a:lnTo>
-                  <a:pt x="600032" y="898011"/>
-                </a:lnTo>
-                <a:lnTo>
-                  <a:pt x="542095" y="871760"/>
-                </a:lnTo>
-                <a:lnTo>
-                  <a:pt x="486000" y="841777"/>
-                </a:lnTo>
-                <a:lnTo>
-                  <a:pt x="431986" y="808188"/>
-                </a:lnTo>
-                <a:lnTo>
-                  <a:pt x="380284" y="771139"/>
-                </a:lnTo>
-                <a:lnTo>
-                  <a:pt x="331116" y="730788"/>
-                </a:lnTo>
-                <a:lnTo>
-                  <a:pt x="284692" y="687308"/>
-                </a:lnTo>
-                <a:lnTo>
-                  <a:pt x="241212" y="640884"/>
-                </a:lnTo>
-                <a:lnTo>
-                  <a:pt x="200861" y="591716"/>
-                </a:lnTo>
-                <a:lnTo>
-                  <a:pt x="163812" y="540014"/>
-                </a:lnTo>
-                <a:lnTo>
-                  <a:pt x="130223" y="486000"/>
-                </a:lnTo>
-                <a:lnTo>
-                  <a:pt x="100240" y="429905"/>
-                </a:lnTo>
-                <a:lnTo>
-                  <a:pt x="73989" y="371968"/>
-                </a:lnTo>
-                <a:lnTo>
-                  <a:pt x="51584" y="312439"/>
-                </a:lnTo>
-                <a:lnTo>
-                  <a:pt x="33120" y="251572"/>
-                </a:lnTo>
-                <a:lnTo>
-                  <a:pt x="18677" y="189628"/>
-                </a:lnTo>
-                <a:lnTo>
-                  <a:pt x="8316" y="126871"/>
-                </a:lnTo>
-                <a:lnTo>
-                  <a:pt x="2081" y="63572"/>
-                </a:lnTo>
-                <a:lnTo>
-                  <a:pt x="0" y="0"/>
-                </a:lnTo>
-                <a:close/>
-              </a:path>
-            </a:pathLst>
-          </a:custGeom>
+          </a:prstGeom>
+          <a:noFill/>
+          <a:ln w="4320">
+            <a:solidFill>
+              <a:srgbClr val="E3E5E9"/>
+            </a:solidFill>
+          </a:ln>
+        </p:spPr>
+        <p:txBody>
+          <a:bodyPr rtlCol="0" anchor="ctr"/>
+          <a:lstStyle/>
+          <a:p>
+            <a:pPr algn="ctr"/>
+          </a:p>
+        </p:txBody>
+      </p:sp>
+      <p:sp>
+        <p:nvSpPr>
+          <p:cNvPr id="3" name="Oval 2"/>
+          <p:cNvSpPr/>
+          <p:nvPr/>
+        </p:nvSpPr>
+        <p:spPr>
+          <a:xfrm>
+            <a:off x="2124000" y="504000"/>
+            <a:ext cx="792000" cy="792000"/>
+          </a:xfrm>
+          <a:prstGeom prst="ellipse">
+            <a:avLst/>
+          </a:prstGeom>
+          <a:noFill/>
+          <a:ln w="4320">
+            <a:solidFill>
+              <a:srgbClr val="E3E5E9"/>
+            </a:solidFill>
+          </a:ln>
+        </p:spPr>
+        <p:txBody>
+          <a:bodyPr rtlCol="0" anchor="ctr"/>
+          <a:lstStyle/>
+          <a:p>
+            <a:pPr algn="ctr"/>
+          </a:p>
+        </p:txBody>
+      </p:sp>
+      <p:sp>
+        <p:nvSpPr>
+          <p:cNvPr id="4" name="Oval 3"/>
+          <p:cNvSpPr/>
+          <p:nvPr/>
+        </p:nvSpPr>
+        <p:spPr>
+          <a:xfrm>
+            <a:off x="1980000" y="360000"/>
+            <a:ext cx="1080000" cy="1080000"/>
+          </a:xfrm>
+          <a:prstGeom prst="ellipse">
+            <a:avLst/>
+          </a:prstGeom>
+          <a:noFill/>
+          <a:ln w="4320">
+            <a:solidFill>
+              <a:srgbClr val="E3E5E9"/>
+            </a:solidFill>
+          </a:ln>
+        </p:spPr>
+        <p:txBody>
+          <a:bodyPr rtlCol="0" anchor="ctr"/>
+          <a:lstStyle/>
+          <a:p>
+            <a:pPr algn="ctr"/>
+          </a:p>
+        </p:txBody>
+      </p:sp>
+      <p:sp>
+        <p:nvSpPr>
+          <p:cNvPr id="5" name="Oval 4"/>
+          <p:cNvSpPr/>
+          <p:nvPr/>
+        </p:nvSpPr>
+        <p:spPr>
+          <a:xfrm>
+            <a:off x="1872000" y="252000"/>
+            <a:ext cx="1296000" cy="1296000"/>
+          </a:xfrm>
+          <a:prstGeom prst="ellipse">
+            <a:avLst/>
+          </a:prstGeom>
+          <a:noFill/>
+          <a:ln w="4320">
+            <a:solidFill>
+              <a:srgbClr val="F0262F"/>
+            </a:solidFill>
+          </a:ln>
+        </p:spPr>
+        <p:txBody>
+          <a:bodyPr rtlCol="0" anchor="ctr"/>
+          <a:lstStyle/>
+          <a:p>
+            <a:pPr algn="ctr"/>
+          </a:p>
+        </p:txBody>
+      </p:sp>
+      <p:sp>
+        <p:nvSpPr>
+          <p:cNvPr id="6" name="Oval 5"/>
+          <p:cNvSpPr/>
+          <p:nvPr/>
+        </p:nvSpPr>
+        <p:spPr>
+          <a:xfrm>
+            <a:off x="2469600" y="849600"/>
+            <a:ext cx="100800" cy="100800"/>
+          </a:xfrm>
+          <a:prstGeom prst="ellipse">
+            <a:avLst/>
+          </a:prstGeom>
           <a:solidFill>
             <a:srgbClr val="F0262F"/>
           </a:solidFill>
@@ -3215,107 +3244,20 @@
       </p:sp>
       <p:sp>
         <p:nvSpPr>
-          <p:cNvPr id="3" name="Freeform 2"/>
+          <p:cNvPr id="7" name="Oval 6"/>
           <p:cNvSpPr/>
           <p:nvPr/>
         </p:nvSpPr>
         <p:spPr>
           <a:xfrm>
-            <a:off x="2664000" y="0"/>
-            <a:ext cx="576000" cy="576000"/>
-          </a:xfrm>
-          <a:custGeom>
+            <a:off x="2955600" y="421200"/>
+            <a:ext cx="43200" cy="43200"/>
+          </a:xfrm>
+          <a:prstGeom prst="ellipse">
             <a:avLst/>
-            <a:gdLst/>
-            <a:ahLst/>
-            <a:cxnLst/>
-            <a:rect l="l" t="t" r="r" b="b"/>
-            <a:pathLst>
-              <a:path w="576000" h="576000">
-                <a:moveTo>
-                  <a:pt x="576000" y="0"/>
-                </a:moveTo>
-                <a:lnTo>
-                  <a:pt x="576000" y="576000"/>
-                </a:lnTo>
-                <a:lnTo>
-                  <a:pt x="538328" y="574767"/>
-                </a:lnTo>
-                <a:lnTo>
-                  <a:pt x="500817" y="571072"/>
-                </a:lnTo>
-                <a:lnTo>
-                  <a:pt x="463628" y="564932"/>
-                </a:lnTo>
-                <a:lnTo>
-                  <a:pt x="426920" y="556373"/>
-                </a:lnTo>
-                <a:lnTo>
-                  <a:pt x="390851" y="545432"/>
-                </a:lnTo>
-                <a:lnTo>
-                  <a:pt x="355574" y="532155"/>
-                </a:lnTo>
-                <a:lnTo>
-                  <a:pt x="321242" y="516599"/>
-                </a:lnTo>
-                <a:lnTo>
-                  <a:pt x="288000" y="498831"/>
-                </a:lnTo>
-                <a:lnTo>
-                  <a:pt x="255992" y="478926"/>
-                </a:lnTo>
-                <a:lnTo>
-                  <a:pt x="225353" y="456972"/>
-                </a:lnTo>
-                <a:lnTo>
-                  <a:pt x="196217" y="433060"/>
-                </a:lnTo>
-                <a:lnTo>
-                  <a:pt x="168706" y="407294"/>
-                </a:lnTo>
-                <a:lnTo>
-                  <a:pt x="142940" y="379783"/>
-                </a:lnTo>
-                <a:lnTo>
-                  <a:pt x="119028" y="350647"/>
-                </a:lnTo>
-                <a:lnTo>
-                  <a:pt x="97074" y="320008"/>
-                </a:lnTo>
-                <a:lnTo>
-                  <a:pt x="77169" y="288000"/>
-                </a:lnTo>
-                <a:lnTo>
-                  <a:pt x="59401" y="254758"/>
-                </a:lnTo>
-                <a:lnTo>
-                  <a:pt x="43845" y="220426"/>
-                </a:lnTo>
-                <a:lnTo>
-                  <a:pt x="30568" y="185149"/>
-                </a:lnTo>
-                <a:lnTo>
-                  <a:pt x="19627" y="149080"/>
-                </a:lnTo>
-                <a:lnTo>
-                  <a:pt x="11068" y="112372"/>
-                </a:lnTo>
-                <a:lnTo>
-                  <a:pt x="4928" y="75183"/>
-                </a:lnTo>
-                <a:lnTo>
-                  <a:pt x="1233" y="37672"/>
-                </a:lnTo>
-                <a:lnTo>
-                  <a:pt x="0" y="0"/>
-                </a:lnTo>
-                <a:close/>
-              </a:path>
-            </a:pathLst>
-          </a:custGeom>
+          </a:prstGeom>
           <a:solidFill>
-            <a:srgbClr val="FDE1E2"/>
+            <a:srgbClr val="F0262F"/>
           </a:solidFill>
           <a:ln>
             <a:noFill/>
@@ -3331,14 +3273,14 @@
       </p:sp>
       <p:sp>
         <p:nvSpPr>
-          <p:cNvPr id="4" name="텍스트"/>
+          <p:cNvPr id="8" name="텍스트"/>
           <p:cNvSpPr txBox="1"/>
           <p:nvPr/>
         </p:nvSpPr>
         <p:spPr>
           <a:xfrm>
-            <a:off x="252000" y="540000"/>
-            <a:ext cx="1944000" cy="360000"/>
+            <a:off x="252000" y="252000"/>
+            <a:ext cx="1512000" cy="123826"/>
           </a:xfrm>
           <a:prstGeom prst="rect">
             <a:avLst/>
@@ -3353,11 +3295,51 @@
           <a:p>
             <a:pPr algn="l">
               <a:lnSpc>
-                <a:spcPts val="3190"/>
+                <a:spcPts val="942"/>
               </a:lnSpc>
             </a:pPr>
             <a:r>
-              <a:rPr sz="2200" b="1">
+              <a:rPr sz="650" b="1" spc="220">
+                <a:solidFill>
+                  <a:srgbClr val="6B7280"/>
+                </a:solidFill>
+                <a:latin typeface="맑은 고딕"/>
+                <a:ea typeface="맑은 고딕"/>
+              </a:rPr>
+              <a:t>의원 · 약국 이름</a:t>
+            </a:r>
+          </a:p>
+        </p:txBody>
+      </p:sp>
+      <p:sp>
+        <p:nvSpPr>
+          <p:cNvPr id="9" name="텍스트"/>
+          <p:cNvSpPr txBox="1"/>
+          <p:nvPr/>
+        </p:nvSpPr>
+        <p:spPr>
+          <a:xfrm>
+            <a:off x="252000" y="612000"/>
+            <a:ext cx="1800000" cy="237600"/>
+          </a:xfrm>
+          <a:prstGeom prst="rect">
+            <a:avLst/>
+          </a:prstGeom>
+          <a:noFill/>
+        </p:spPr>
+        <p:txBody>
+          <a:bodyPr wrap="square" lIns="0" rIns="0" tIns="0" bIns="0" anchor="t">
+            <a:spAutoFit/>
+          </a:bodyPr>
+          <a:lstStyle/>
+          <a:p>
+            <a:pPr algn="l">
+              <a:lnSpc>
+                <a:spcPts val="1957"/>
+              </a:lnSpc>
+            </a:pPr>
+            <a:r>
+              <a:rPr sz="1350" b="1" spc="120">
                 <a:solidFill>
                   <a:srgbClr val="12151C"/>
                 </a:solidFill>
@@ -3371,14 +3353,14 @@
       </p:sp>
       <p:sp>
         <p:nvSpPr>
-          <p:cNvPr id="5" name="텍스트"/>
+          <p:cNvPr id="10" name="텍스트"/>
           <p:cNvSpPr txBox="1"/>
           <p:nvPr/>
         </p:nvSpPr>
         <p:spPr>
           <a:xfrm>
-            <a:off x="252000" y="943200"/>
-            <a:ext cx="1944000" cy="171451"/>
+            <a:off x="252000" y="864000"/>
+            <a:ext cx="1800000" cy="133351"/>
           </a:xfrm>
           <a:prstGeom prst="rect">
             <a:avLst/>
@@ -3393,11 +3375,11 @@
           <a:p>
             <a:pPr algn="l">
               <a:lnSpc>
-                <a:spcPts val="1305"/>
+                <a:spcPts val="1015"/>
               </a:lnSpc>
             </a:pPr>
             <a:r>
-              <a:rPr sz="900" b="0">
+              <a:rPr sz="700" b="0" spc="60">
                 <a:solidFill>
                   <a:srgbClr val="6B7280"/>
                 </a:solidFill>
@@ -3411,14 +3393,43 @@
       </p:sp>
       <p:sp>
         <p:nvSpPr>
-          <p:cNvPr id="6" name="텍스트"/>
+          <p:cNvPr id="11" name="Rectangle 10"/>
+          <p:cNvSpPr/>
+          <p:nvPr/>
+        </p:nvSpPr>
+        <p:spPr>
+          <a:xfrm>
+            <a:off x="252000" y="1080000"/>
+            <a:ext cx="129600" cy="14400"/>
+          </a:xfrm>
+          <a:prstGeom prst="rect">
+            <a:avLst/>
+          </a:prstGeom>
+          <a:solidFill>
+            <a:srgbClr val="F0262F"/>
+          </a:solidFill>
+          <a:ln>
+            <a:noFill/>
+          </a:ln>
+        </p:spPr>
+        <p:txBody>
+          <a:bodyPr rtlCol="0" anchor="ctr"/>
+          <a:lstStyle/>
+          <a:p>
+            <a:pPr algn="ctr"/>
+          </a:p>
+        </p:txBody>
+      </p:sp>
+      <p:sp>
+        <p:nvSpPr>
+          <p:cNvPr id="12" name="텍스트"/>
           <p:cNvSpPr txBox="1"/>
           <p:nvPr/>
         </p:nvSpPr>
         <p:spPr>
           <a:xfrm>
-            <a:off x="252000" y="223200"/>
-            <a:ext cx="1440000" cy="133351"/>
+            <a:off x="252000" y="1213200"/>
+            <a:ext cx="331200" cy="91441"/>
           </a:xfrm>
           <a:prstGeom prst="rect">
             <a:avLst/>
@@ -3433,51 +3444,11 @@
           <a:p>
             <a:pPr algn="l">
               <a:lnSpc>
-                <a:spcPts val="1015"/>
+                <a:spcPts val="696"/>
               </a:lnSpc>
             </a:pPr>
             <a:r>
-              <a:rPr sz="700" b="1" spc="200">
-                <a:solidFill>
-                  <a:srgbClr val="6B7280"/>
-                </a:solidFill>
-                <a:latin typeface="맑은 고딕"/>
-                <a:ea typeface="맑은 고딕"/>
-              </a:rPr>
-              <a:t>의원 · 약국 이름</a:t>
-            </a:r>
-          </a:p>
-        </p:txBody>
-      </p:sp>
-      <p:sp>
-        <p:nvSpPr>
-          <p:cNvPr id="7" name="텍스트"/>
-          <p:cNvSpPr txBox="1"/>
-          <p:nvPr/>
-        </p:nvSpPr>
-        <p:spPr>
-          <a:xfrm>
-            <a:off x="252000" y="1234800"/>
-            <a:ext cx="331200" cy="99061"/>
-          </a:xfrm>
-          <a:prstGeom prst="rect">
-            <a:avLst/>
-          </a:prstGeom>
-          <a:noFill/>
-        </p:spPr>
-        <p:txBody>
-          <a:bodyPr wrap="square" lIns="0" rIns="0" tIns="0" bIns="0" anchor="t">
-            <a:spAutoFit/>
-          </a:bodyPr>
-          <a:lstStyle/>
-          <a:p>
-            <a:pPr algn="l">
-              <a:lnSpc>
-                <a:spcPts val="754"/>
-              </a:lnSpc>
-            </a:pPr>
-            <a:r>
-              <a:rPr sz="520" b="1" spc="120">
+              <a:rPr sz="480" b="1" spc="140">
                 <a:solidFill>
                   <a:srgbClr val="6B7280"/>
                 </a:solidFill>
@@ -3491,14 +3462,14 @@
       </p:sp>
       <p:sp>
         <p:nvSpPr>
-          <p:cNvPr id="8" name="텍스트"/>
+          <p:cNvPr id="13" name="텍스트"/>
           <p:cNvSpPr txBox="1"/>
           <p:nvPr/>
         </p:nvSpPr>
         <p:spPr>
           <a:xfrm>
-            <a:off x="583200" y="1224000"/>
-            <a:ext cx="1512000" cy="133351"/>
+            <a:off x="583200" y="1202400"/>
+            <a:ext cx="1188000" cy="123826"/>
           </a:xfrm>
           <a:prstGeom prst="rect">
             <a:avLst/>
@@ -3513,11 +3484,11 @@
           <a:p>
             <a:pPr algn="l">
               <a:lnSpc>
-                <a:spcPts val="1015"/>
+                <a:spcPts val="942"/>
               </a:lnSpc>
             </a:pPr>
             <a:r>
-              <a:rPr sz="700" b="0">
+              <a:rPr sz="650" b="0">
                 <a:solidFill>
                   <a:srgbClr val="12151C"/>
                 </a:solidFill>
@@ -3531,14 +3502,14 @@
       </p:sp>
       <p:sp>
         <p:nvSpPr>
-          <p:cNvPr id="9" name="텍스트"/>
+          <p:cNvPr id="14" name="텍스트"/>
           <p:cNvSpPr txBox="1"/>
           <p:nvPr/>
         </p:nvSpPr>
         <p:spPr>
           <a:xfrm>
-            <a:off x="252000" y="1371600"/>
-            <a:ext cx="331200" cy="99061"/>
+            <a:off x="252000" y="1342800"/>
+            <a:ext cx="331200" cy="91441"/>
           </a:xfrm>
           <a:prstGeom prst="rect">
             <a:avLst/>
@@ -3553,11 +3524,11 @@
           <a:p>
             <a:pPr algn="l">
               <a:lnSpc>
-                <a:spcPts val="754"/>
+                <a:spcPts val="696"/>
               </a:lnSpc>
             </a:pPr>
             <a:r>
-              <a:rPr sz="520" b="1" spc="120">
+              <a:rPr sz="480" b="1" spc="140">
                 <a:solidFill>
                   <a:srgbClr val="6B7280"/>
                 </a:solidFill>
@@ -3571,14 +3542,14 @@
       </p:sp>
       <p:sp>
         <p:nvSpPr>
-          <p:cNvPr id="10" name="텍스트"/>
+          <p:cNvPr id="15" name="텍스트"/>
           <p:cNvSpPr txBox="1"/>
           <p:nvPr/>
         </p:nvSpPr>
         <p:spPr>
           <a:xfrm>
-            <a:off x="583200" y="1360800"/>
-            <a:ext cx="1512000" cy="133351"/>
+            <a:off x="583200" y="1332000"/>
+            <a:ext cx="1188000" cy="123826"/>
           </a:xfrm>
           <a:prstGeom prst="rect">
             <a:avLst/>
@@ -3593,11 +3564,11 @@
           <a:p>
             <a:pPr algn="l">
               <a:lnSpc>
-                <a:spcPts val="1015"/>
+                <a:spcPts val="942"/>
               </a:lnSpc>
             </a:pPr>
             <a:r>
-              <a:rPr sz="700" b="0">
+              <a:rPr sz="650" b="0">
                 <a:solidFill>
                   <a:srgbClr val="12151C"/>
                 </a:solidFill>
@@ -3611,14 +3582,14 @@
       </p:sp>
       <p:sp>
         <p:nvSpPr>
-          <p:cNvPr id="11" name="텍스트"/>
+          <p:cNvPr id="16" name="텍스트"/>
           <p:cNvSpPr txBox="1"/>
           <p:nvPr/>
         </p:nvSpPr>
         <p:spPr>
           <a:xfrm>
-            <a:off x="252000" y="1508400"/>
-            <a:ext cx="331200" cy="99061"/>
+            <a:off x="252000" y="1472400"/>
+            <a:ext cx="331200" cy="91441"/>
           </a:xfrm>
           <a:prstGeom prst="rect">
             <a:avLst/>
@@ -3633,11 +3604,11 @@
           <a:p>
             <a:pPr algn="l">
               <a:lnSpc>
-                <a:spcPts val="754"/>
+                <a:spcPts val="696"/>
               </a:lnSpc>
             </a:pPr>
             <a:r>
-              <a:rPr sz="520" b="1" spc="120">
+              <a:rPr sz="480" b="1" spc="140">
                 <a:solidFill>
                   <a:srgbClr val="6B7280"/>
                 </a:solidFill>
@@ -3651,14 +3622,14 @@
       </p:sp>
       <p:sp>
         <p:nvSpPr>
-          <p:cNvPr id="12" name="텍스트"/>
+          <p:cNvPr id="17" name="텍스트"/>
           <p:cNvSpPr txBox="1"/>
           <p:nvPr/>
         </p:nvSpPr>
         <p:spPr>
           <a:xfrm>
-            <a:off x="583200" y="1497600"/>
-            <a:ext cx="1512000" cy="133351"/>
+            <a:off x="583200" y="1461600"/>
+            <a:ext cx="1188000" cy="123826"/>
           </a:xfrm>
           <a:prstGeom prst="rect">
             <a:avLst/>
@@ -3673,11 +3644,11 @@
           <a:p>
             <a:pPr algn="l">
               <a:lnSpc>
-                <a:spcPts val="1015"/>
+                <a:spcPts val="942"/>
               </a:lnSpc>
             </a:pPr>
             <a:r>
-              <a:rPr sz="700" b="0">
+              <a:rPr sz="650" b="0">
                 <a:solidFill>
                   <a:srgbClr val="12151C"/>
                 </a:solidFill>
@@ -3717,43 +3688,14 @@
       <p:grpSpPr/>
       <p:sp>
         <p:nvSpPr>
-          <p:cNvPr id="2" name="Rectangle 1"/>
-          <p:cNvSpPr/>
-          <p:nvPr/>
-        </p:nvSpPr>
-        <p:spPr>
-          <a:xfrm>
-            <a:off x="252000" y="540000"/>
-            <a:ext cx="28800" cy="720000"/>
-          </a:xfrm>
-          <a:prstGeom prst="rect">
-            <a:avLst/>
-          </a:prstGeom>
-          <a:solidFill>
-            <a:srgbClr val="F0262F"/>
-          </a:solidFill>
-          <a:ln>
-            <a:noFill/>
-          </a:ln>
-        </p:spPr>
-        <p:txBody>
-          <a:bodyPr rtlCol="0" anchor="ctr"/>
-          <a:lstStyle/>
-          <a:p>
-            <a:pPr algn="ctr"/>
-          </a:p>
-        </p:txBody>
-      </p:sp>
-      <p:sp>
-        <p:nvSpPr>
-          <p:cNvPr id="3" name="텍스트"/>
+          <p:cNvPr id="2" name="텍스트"/>
           <p:cNvSpPr txBox="1"/>
           <p:nvPr/>
         </p:nvSpPr>
         <p:spPr>
           <a:xfrm>
-            <a:off x="424800" y="612000"/>
-            <a:ext cx="2160000" cy="648000"/>
+            <a:off x="252000" y="223200"/>
+            <a:ext cx="1080000" cy="99061"/>
           </a:xfrm>
           <a:prstGeom prst="rect">
             <a:avLst/>
@@ -3768,49 +3710,255 @@
           <a:p>
             <a:pPr algn="l">
               <a:lnSpc>
-                <a:spcPts val="1812"/>
+                <a:spcPts val="754"/>
               </a:lnSpc>
             </a:pPr>
             <a:r>
-              <a:rPr sz="1250" b="1">
+              <a:rPr sz="520" b="1" spc="240">
+                <a:solidFill>
+                  <a:srgbClr val="661B23"/>
+                </a:solidFill>
+                <a:latin typeface="맑은 고딕"/>
+                <a:ea typeface="맑은 고딕"/>
+              </a:rPr>
+              <a:t>진료 · 상담</a:t>
+            </a:r>
+          </a:p>
+        </p:txBody>
+      </p:sp>
+      <p:cxnSp>
+        <p:nvCxnSpPr>
+          <p:cNvPr id="3" name="Connector 2"/>
+          <p:cNvCxnSpPr/>
+          <p:nvPr/>
+        </p:nvCxnSpPr>
+        <p:spPr>
+          <a:xfrm>
+            <a:off x="252000" y="388800"/>
+            <a:ext cx="2736000" cy="0"/>
+          </a:xfrm>
+          <a:prstGeom prst="line">
+            <a:avLst/>
+          </a:prstGeom>
+          <a:ln w="3600">
+            <a:solidFill>
+              <a:srgbClr val="FBC2C5"/>
+            </a:solidFill>
+          </a:ln>
+        </p:spPr>
+      </p:cxnSp>
+      <p:sp>
+        <p:nvSpPr>
+          <p:cNvPr id="4" name="텍스트"/>
+          <p:cNvSpPr txBox="1"/>
+          <p:nvPr/>
+        </p:nvSpPr>
+        <p:spPr>
+          <a:xfrm>
+            <a:off x="252000" y="468000"/>
+            <a:ext cx="216000" cy="99061"/>
+          </a:xfrm>
+          <a:prstGeom prst="rect">
+            <a:avLst/>
+          </a:prstGeom>
+          <a:noFill/>
+        </p:spPr>
+        <p:txBody>
+          <a:bodyPr wrap="square" lIns="0" rIns="0" tIns="0" bIns="0" anchor="t">
+            <a:spAutoFit/>
+          </a:bodyPr>
+          <a:lstStyle/>
+          <a:p>
+            <a:pPr algn="l">
+              <a:lnSpc>
+                <a:spcPts val="754"/>
+              </a:lnSpc>
+            </a:pPr>
+            <a:r>
+              <a:rPr sz="520" b="1" spc="100">
+                <a:solidFill>
+                  <a:srgbClr val="F0262F"/>
+                </a:solidFill>
+                <a:latin typeface="맑은 고딕"/>
+                <a:ea typeface="맑은 고딕"/>
+              </a:rPr>
+              <a:t>01</a:t>
+            </a:r>
+          </a:p>
+        </p:txBody>
+      </p:sp>
+      <p:sp>
+        <p:nvSpPr>
+          <p:cNvPr id="5" name="텍스트"/>
+          <p:cNvSpPr txBox="1"/>
+          <p:nvPr/>
+        </p:nvSpPr>
+        <p:spPr>
+          <a:xfrm>
+            <a:off x="475200" y="457200"/>
+            <a:ext cx="1152000" cy="140971"/>
+          </a:xfrm>
+          <a:prstGeom prst="rect">
+            <a:avLst/>
+          </a:prstGeom>
+          <a:noFill/>
+        </p:spPr>
+        <p:txBody>
+          <a:bodyPr wrap="square" lIns="0" rIns="0" tIns="0" bIns="0" anchor="t">
+            <a:spAutoFit/>
+          </a:bodyPr>
+          <a:lstStyle/>
+          <a:p>
+            <a:pPr algn="l">
+              <a:lnSpc>
+                <a:spcPts val="1073"/>
+              </a:lnSpc>
+            </a:pPr>
+            <a:r>
+              <a:rPr sz="740" b="0">
                 <a:solidFill>
                   <a:srgbClr val="12151C"/>
                 </a:solidFill>
                 <a:latin typeface="맑은 고딕"/>
                 <a:ea typeface="맑은 고딕"/>
               </a:rPr>
-              <a:t>환하게 웃는</a:t>
-            </a:r>
-          </a:p>
+              <a:t>일반 진료</a:t>
+            </a:r>
+          </a:p>
+        </p:txBody>
+      </p:sp>
+      <p:cxnSp>
+        <p:nvCxnSpPr>
+          <p:cNvPr id="6" name="Connector 5"/>
+          <p:cNvCxnSpPr/>
+          <p:nvPr/>
+        </p:nvCxnSpPr>
+        <p:spPr>
+          <a:xfrm>
+            <a:off x="252000" y="691200"/>
+            <a:ext cx="1296000" cy="0"/>
+          </a:xfrm>
+          <a:prstGeom prst="line">
+            <a:avLst/>
+          </a:prstGeom>
+          <a:ln w="3600">
+            <a:solidFill>
+              <a:srgbClr val="FBC2C5"/>
+            </a:solidFill>
+          </a:ln>
+        </p:spPr>
+      </p:cxnSp>
+      <p:sp>
+        <p:nvSpPr>
+          <p:cNvPr id="7" name="텍스트"/>
+          <p:cNvSpPr txBox="1"/>
+          <p:nvPr/>
+        </p:nvSpPr>
+        <p:spPr>
+          <a:xfrm>
+            <a:off x="1656000" y="468000"/>
+            <a:ext cx="216000" cy="99061"/>
+          </a:xfrm>
+          <a:prstGeom prst="rect">
+            <a:avLst/>
+          </a:prstGeom>
+          <a:noFill/>
+        </p:spPr>
+        <p:txBody>
+          <a:bodyPr wrap="square" lIns="0" rIns="0" tIns="0" bIns="0" anchor="t">
+            <a:spAutoFit/>
+          </a:bodyPr>
+          <a:lstStyle/>
           <a:p>
             <a:pPr algn="l">
               <a:lnSpc>
-                <a:spcPts val="1812"/>
+                <a:spcPts val="754"/>
               </a:lnSpc>
             </a:pPr>
             <a:r>
-              <a:rPr sz="1250" b="1">
+              <a:rPr sz="520" b="1" spc="100">
+                <a:solidFill>
+                  <a:srgbClr val="F0262F"/>
+                </a:solidFill>
+                <a:latin typeface="맑은 고딕"/>
+                <a:ea typeface="맑은 고딕"/>
+              </a:rPr>
+              <a:t>02</a:t>
+            </a:r>
+          </a:p>
+        </p:txBody>
+      </p:sp>
+      <p:sp>
+        <p:nvSpPr>
+          <p:cNvPr id="8" name="텍스트"/>
+          <p:cNvSpPr txBox="1"/>
+          <p:nvPr/>
+        </p:nvSpPr>
+        <p:spPr>
+          <a:xfrm>
+            <a:off x="1879200" y="457200"/>
+            <a:ext cx="1152000" cy="140971"/>
+          </a:xfrm>
+          <a:prstGeom prst="rect">
+            <a:avLst/>
+          </a:prstGeom>
+          <a:noFill/>
+        </p:spPr>
+        <p:txBody>
+          <a:bodyPr wrap="square" lIns="0" rIns="0" tIns="0" bIns="0" anchor="t">
+            <a:spAutoFit/>
+          </a:bodyPr>
+          <a:lstStyle/>
+          <a:p>
+            <a:pPr algn="l">
+              <a:lnSpc>
+                <a:spcPts val="1073"/>
+              </a:lnSpc>
+            </a:pPr>
+            <a:r>
+              <a:rPr sz="740" b="0">
                 <a:solidFill>
                   <a:srgbClr val="12151C"/>
                 </a:solidFill>
                 <a:latin typeface="맑은 고딕"/>
                 <a:ea typeface="맑은 고딕"/>
               </a:rPr>
-              <a:t>하루를 돕겠습니다</a:t>
-            </a:r>
-          </a:p>
-        </p:txBody>
-      </p:sp>
-      <p:sp>
-        <p:nvSpPr>
-          <p:cNvPr id="4" name="텍스트"/>
+              <a:t>재활 치료</a:t>
+            </a:r>
+          </a:p>
+        </p:txBody>
+      </p:sp>
+      <p:cxnSp>
+        <p:nvCxnSpPr>
+          <p:cNvPr id="9" name="Connector 8"/>
+          <p:cNvCxnSpPr/>
+          <p:nvPr/>
+        </p:nvCxnSpPr>
+        <p:spPr>
+          <a:xfrm>
+            <a:off x="1656000" y="691200"/>
+            <a:ext cx="1296000" cy="0"/>
+          </a:xfrm>
+          <a:prstGeom prst="line">
+            <a:avLst/>
+          </a:prstGeom>
+          <a:ln w="3600">
+            <a:solidFill>
+              <a:srgbClr val="FBC2C5"/>
+            </a:solidFill>
+          </a:ln>
+        </p:spPr>
+      </p:cxnSp>
+      <p:sp>
+        <p:nvSpPr>
+          <p:cNvPr id="10" name="텍스트"/>
           <p:cNvSpPr txBox="1"/>
           <p:nvPr/>
         </p:nvSpPr>
         <p:spPr>
           <a:xfrm>
-            <a:off x="424800" y="1512000"/>
-            <a:ext cx="1800000" cy="123826"/>
+            <a:off x="252000" y="813600"/>
+            <a:ext cx="216000" cy="99061"/>
           </a:xfrm>
           <a:prstGeom prst="rect">
             <a:avLst/>
@@ -3825,18 +3973,260 @@
           <a:p>
             <a:pPr algn="l">
               <a:lnSpc>
-                <a:spcPts val="942"/>
+                <a:spcPts val="754"/>
               </a:lnSpc>
             </a:pPr>
             <a:r>
-              <a:rPr sz="650" b="1" spc="200">
+              <a:rPr sz="520" b="1" spc="100">
+                <a:solidFill>
+                  <a:srgbClr val="F0262F"/>
+                </a:solidFill>
+                <a:latin typeface="맑은 고딕"/>
+                <a:ea typeface="맑은 고딕"/>
+              </a:rPr>
+              <a:t>03</a:t>
+            </a:r>
+          </a:p>
+        </p:txBody>
+      </p:sp>
+      <p:sp>
+        <p:nvSpPr>
+          <p:cNvPr id="11" name="텍스트"/>
+          <p:cNvSpPr txBox="1"/>
+          <p:nvPr/>
+        </p:nvSpPr>
+        <p:spPr>
+          <a:xfrm>
+            <a:off x="475200" y="802800"/>
+            <a:ext cx="1152000" cy="140971"/>
+          </a:xfrm>
+          <a:prstGeom prst="rect">
+            <a:avLst/>
+          </a:prstGeom>
+          <a:noFill/>
+        </p:spPr>
+        <p:txBody>
+          <a:bodyPr wrap="square" lIns="0" rIns="0" tIns="0" bIns="0" anchor="t">
+            <a:spAutoFit/>
+          </a:bodyPr>
+          <a:lstStyle/>
+          <a:p>
+            <a:pPr algn="l">
+              <a:lnSpc>
+                <a:spcPts val="1073"/>
+              </a:lnSpc>
+            </a:pPr>
+            <a:r>
+              <a:rPr sz="740" b="0">
+                <a:solidFill>
+                  <a:srgbClr val="12151C"/>
+                </a:solidFill>
+                <a:latin typeface="맑은 고딕"/>
+                <a:ea typeface="맑은 고딕"/>
+              </a:rPr>
+              <a:t>복약 상담</a:t>
+            </a:r>
+          </a:p>
+        </p:txBody>
+      </p:sp>
+      <p:cxnSp>
+        <p:nvCxnSpPr>
+          <p:cNvPr id="12" name="Connector 11"/>
+          <p:cNvCxnSpPr/>
+          <p:nvPr/>
+        </p:nvCxnSpPr>
+        <p:spPr>
+          <a:xfrm>
+            <a:off x="252000" y="1036800"/>
+            <a:ext cx="1296000" cy="0"/>
+          </a:xfrm>
+          <a:prstGeom prst="line">
+            <a:avLst/>
+          </a:prstGeom>
+          <a:ln w="3600">
+            <a:solidFill>
+              <a:srgbClr val="FBC2C5"/>
+            </a:solidFill>
+          </a:ln>
+        </p:spPr>
+      </p:cxnSp>
+      <p:sp>
+        <p:nvSpPr>
+          <p:cNvPr id="13" name="텍스트"/>
+          <p:cNvSpPr txBox="1"/>
+          <p:nvPr/>
+        </p:nvSpPr>
+        <p:spPr>
+          <a:xfrm>
+            <a:off x="1656000" y="813600"/>
+            <a:ext cx="216000" cy="99061"/>
+          </a:xfrm>
+          <a:prstGeom prst="rect">
+            <a:avLst/>
+          </a:prstGeom>
+          <a:noFill/>
+        </p:spPr>
+        <p:txBody>
+          <a:bodyPr wrap="square" lIns="0" rIns="0" tIns="0" bIns="0" anchor="t">
+            <a:spAutoFit/>
+          </a:bodyPr>
+          <a:lstStyle/>
+          <a:p>
+            <a:pPr algn="l">
+              <a:lnSpc>
+                <a:spcPts val="754"/>
+              </a:lnSpc>
+            </a:pPr>
+            <a:r>
+              <a:rPr sz="520" b="1" spc="100">
+                <a:solidFill>
+                  <a:srgbClr val="F0262F"/>
+                </a:solidFill>
+                <a:latin typeface="맑은 고딕"/>
+                <a:ea typeface="맑은 고딕"/>
+              </a:rPr>
+              <a:t>04</a:t>
+            </a:r>
+          </a:p>
+        </p:txBody>
+      </p:sp>
+      <p:sp>
+        <p:nvSpPr>
+          <p:cNvPr id="14" name="텍스트"/>
+          <p:cNvSpPr txBox="1"/>
+          <p:nvPr/>
+        </p:nvSpPr>
+        <p:spPr>
+          <a:xfrm>
+            <a:off x="1879200" y="802800"/>
+            <a:ext cx="1152000" cy="140971"/>
+          </a:xfrm>
+          <a:prstGeom prst="rect">
+            <a:avLst/>
+          </a:prstGeom>
+          <a:noFill/>
+        </p:spPr>
+        <p:txBody>
+          <a:bodyPr wrap="square" lIns="0" rIns="0" tIns="0" bIns="0" anchor="t">
+            <a:spAutoFit/>
+          </a:bodyPr>
+          <a:lstStyle/>
+          <a:p>
+            <a:pPr algn="l">
+              <a:lnSpc>
+                <a:spcPts val="1073"/>
+              </a:lnSpc>
+            </a:pPr>
+            <a:r>
+              <a:rPr sz="740" b="0">
+                <a:solidFill>
+                  <a:srgbClr val="12151C"/>
+                </a:solidFill>
+                <a:latin typeface="맑은 고딕"/>
+                <a:ea typeface="맑은 고딕"/>
+              </a:rPr>
+              <a:t>물리 치료</a:t>
+            </a:r>
+          </a:p>
+        </p:txBody>
+      </p:sp>
+      <p:cxnSp>
+        <p:nvCxnSpPr>
+          <p:cNvPr id="15" name="Connector 14"/>
+          <p:cNvCxnSpPr/>
+          <p:nvPr/>
+        </p:nvCxnSpPr>
+        <p:spPr>
+          <a:xfrm>
+            <a:off x="1656000" y="1036800"/>
+            <a:ext cx="1296000" cy="0"/>
+          </a:xfrm>
+          <a:prstGeom prst="line">
+            <a:avLst/>
+          </a:prstGeom>
+          <a:ln w="3600">
+            <a:solidFill>
+              <a:srgbClr val="FBC2C5"/>
+            </a:solidFill>
+          </a:ln>
+        </p:spPr>
+      </p:cxnSp>
+      <p:sp>
+        <p:nvSpPr>
+          <p:cNvPr id="16" name="텍스트"/>
+          <p:cNvSpPr txBox="1"/>
+          <p:nvPr/>
+        </p:nvSpPr>
+        <p:spPr>
+          <a:xfrm>
+            <a:off x="252000" y="1569600"/>
+            <a:ext cx="1368000" cy="114301"/>
+          </a:xfrm>
+          <a:prstGeom prst="rect">
+            <a:avLst/>
+          </a:prstGeom>
+          <a:noFill/>
+        </p:spPr>
+        <p:txBody>
+          <a:bodyPr wrap="square" lIns="0" rIns="0" tIns="0" bIns="0" anchor="t">
+            <a:spAutoFit/>
+          </a:bodyPr>
+          <a:lstStyle/>
+          <a:p>
+            <a:pPr algn="l">
+              <a:lnSpc>
+                <a:spcPts val="869"/>
+              </a:lnSpc>
+            </a:pPr>
+            <a:r>
+              <a:rPr sz="600" b="0">
                 <a:solidFill>
                   <a:srgbClr val="661B23"/>
                 </a:solidFill>
                 <a:latin typeface="맑은 고딕"/>
                 <a:ea typeface="맑은 고딕"/>
               </a:rPr>
-              <a:t>의원 · 약국 이름</a:t>
+              <a:t>월–금 09:30 – 18:30</a:t>
+            </a:r>
+          </a:p>
+        </p:txBody>
+      </p:sp>
+      <p:sp>
+        <p:nvSpPr>
+          <p:cNvPr id="17" name="텍스트"/>
+          <p:cNvSpPr txBox="1"/>
+          <p:nvPr/>
+        </p:nvSpPr>
+        <p:spPr>
+          <a:xfrm>
+            <a:off x="1620000" y="1569600"/>
+            <a:ext cx="1368000" cy="114301"/>
+          </a:xfrm>
+          <a:prstGeom prst="rect">
+            <a:avLst/>
+          </a:prstGeom>
+          <a:noFill/>
+        </p:spPr>
+        <p:txBody>
+          <a:bodyPr wrap="square" lIns="0" rIns="0" tIns="0" bIns="0" anchor="t">
+            <a:spAutoFit/>
+          </a:bodyPr>
+          <a:lstStyle/>
+          <a:p>
+            <a:pPr algn="r">
+              <a:lnSpc>
+                <a:spcPts val="869"/>
+              </a:lnSpc>
+            </a:pPr>
+            <a:r>
+              <a:rPr sz="600" b="0">
+                <a:solidFill>
+                  <a:srgbClr val="661B23"/>
+                </a:solidFill>
+                <a:latin typeface="맑은 고딕"/>
+                <a:ea typeface="맑은 고딕"/>
+              </a:rPr>
+              <a:t>www.example.com</a:t>
             </a:r>
           </a:p>
         </p:txBody>
